--- a/hackathon_materials/slides/Connect-Force_submission.pptx
+++ b/hackathon_materials/slides/Connect-Force_submission.pptx
@@ -3421,7 +3421,7 @@
                           </a:solidFill>
                           <a:latin typeface="Noto Sans JP"/>
                         </a:rPr>
-                        <a:t>端末で隠す／既定オフ・確認・同意・承認／共有先を限定／宛先なしのGmailリンク／AIに渡さない操作</a:t>
+                        <a:t>端末で隠す／既定オフ・確認・同意・承認／共有先を限定／Gmailの作成画面へのリンク／AIに渡さない操作</a:t>
                       </a:r>
                     </a:p>
                   </a:txBody>
@@ -3763,7 +3763,7 @@
                 </a:solidFill>
                 <a:latin typeface="Noto Sans JP"/>
               </a:rPr>
-              <a:t>リポジトリから、そのまま動かせる（開発モード・テスト 839 件）</a:t>
+              <a:t>リポジトリから、そのまま動かせる（開発モード・テスト 853 件）</a:t>
             </a:r>
           </a:p>
         </p:txBody>
@@ -7079,7 +7079,7 @@
                 </a:solidFill>
                 <a:latin typeface="Noto Sans JP"/>
               </a:rPr>
-              <a:t>送信の準備：Gmailの作成画面を開く（宛先なし。送るのは人）</a:t>
+              <a:t>送信の準備：Gmailの作成画面を開く（自分のGmailを設定すれば宛先に。送るのは人）</a:t>
             </a:r>
           </a:p>
           <a:p>
@@ -7485,7 +7485,7 @@
                 </a:solidFill>
                 <a:latin typeface="Noto Sans JP"/>
               </a:rPr>
-              <a:t>自動テスト 839 件 ／ 門を外すと失敗する変異 35 か所</a:t>
+              <a:t>自動テスト 853 件 ／ 門を外すと失敗する変異 35 か所</a:t>
             </a:r>
           </a:p>
         </p:txBody>
@@ -8741,7 +8741,7 @@
                 </a:solidFill>
                 <a:latin typeface="Noto Sans JP"/>
               </a:rPr>
-              <a:t>839</a:t>
+              <a:t>853</a:t>
             </a:r>
           </a:p>
         </p:txBody>

--- a/hackathon_materials/slides/Connect-Force_submission.pptx
+++ b/hackathon_materials/slides/Connect-Force_submission.pptx
@@ -6531,41 +6531,6 @@
           </a:p>
         </p:txBody>
       </p:sp>
-      <p:sp>
-        <p:nvSpPr>
-          <p:cNvPr id="23" name="TextBox 22"/>
-          <p:cNvSpPr txBox="1"/>
-          <p:nvPr/>
-        </p:nvSpPr>
-        <p:spPr>
-          <a:xfrm>
-            <a:off x="640080" y="5989320"/>
-            <a:ext cx="10972800" cy="365760"/>
-          </a:xfrm>
-          <a:prstGeom prst="rect">
-            <a:avLst/>
-          </a:prstGeom>
-          <a:noFill/>
-        </p:spPr>
-        <p:txBody>
-          <a:bodyPr wrap="square" lIns="45720" rIns="45720" tIns="27432" bIns="27432" anchor="t">
-            <a:spAutoFit/>
-          </a:bodyPr>
-          <a:lstStyle/>
-          <a:p>
-            <a:pPr algn="ctr"/>
-            <a:r>
-              <a:rPr sz="1400" b="0">
-                <a:solidFill>
-                  <a:srgbClr val="5B6B7D"/>
-                </a:solidFill>
-                <a:latin typeface="Noto Sans JP"/>
-              </a:rPr>
-              <a:t>起動できないときは、検証の通しを録画した動画で紹介する</a:t>
-            </a:r>
-          </a:p>
-        </p:txBody>
-      </p:sp>
     </p:spTree>
   </p:cSld>
   <p:clrMapOvr>
@@ -6614,7 +6579,7 @@
                 </a:solidFill>
                 <a:latin typeface="Noto Sans JP"/>
               </a:rPr>
-              <a:t>デモ画面（検証の通し）</a:t>
+              <a:t>通話画面：AIが見るのは、開けた所だけ</a:t>
             </a:r>
           </a:p>
         </p:txBody>
@@ -6649,7 +6614,7 @@
                 </a:solidFill>
                 <a:latin typeface="Noto Sans JP"/>
               </a:rPr>
-              <a:t>なぞって囲んで、対象の物だけを開ける → 会話と結びついた対象に赤丸</a:t>
+              <a:t>はじめ全面をブロックで隠し、なぞって囲んだ所だけを開ける。開けた面積は端末が測る（上限 20%）</a:t>
             </a:r>
           </a:p>
         </p:txBody>
@@ -6691,7 +6656,7 @@
       </p:sp>
       <p:pic>
         <p:nvPicPr>
-          <p:cNvPr id="5" name="Picture 4" descr="02_なぞって開けた.png"/>
+          <p:cNvPr id="5" name="Picture 4" descr="07_vision_filter.png"/>
           <p:cNvPicPr>
             <a:picLocks noChangeAspect="1"/>
           </p:cNvPicPr>
@@ -6706,37 +6671,61 @@
         <p:spPr>
           <a:xfrm>
             <a:off x="457200" y="1554480"/>
-            <a:ext cx="5577840" cy="3486150"/>
+            <a:ext cx="6583680" cy="3703320"/>
           </a:xfrm>
           <a:prstGeom prst="rect">
             <a:avLst/>
           </a:prstGeom>
         </p:spPr>
       </p:pic>
-      <p:pic>
-        <p:nvPicPr>
-          <p:cNvPr id="6" name="Picture 5" descr="05_結果_2.png"/>
-          <p:cNvPicPr>
-            <a:picLocks noChangeAspect="1"/>
-          </p:cNvPicPr>
-          <p:nvPr/>
-        </p:nvPicPr>
-        <p:blipFill>
-          <a:blip r:embed="rId3"/>
-          <a:stretch>
-            <a:fillRect/>
-          </a:stretch>
-        </p:blipFill>
-        <p:spPr>
-          <a:xfrm>
-            <a:off x="6263640" y="1554480"/>
-            <a:ext cx="5394960" cy="5289949"/>
-          </a:xfrm>
-          <a:prstGeom prst="rect">
-            <a:avLst/>
-          </a:prstGeom>
-        </p:spPr>
-      </p:pic>
+      <p:sp>
+        <p:nvSpPr>
+          <p:cNvPr id="6" name="Rounded Rectangle 5"/>
+          <p:cNvSpPr/>
+          <p:nvPr/>
+        </p:nvSpPr>
+        <p:spPr>
+          <a:xfrm>
+            <a:off x="7315200" y="1645920"/>
+            <a:ext cx="4389120" cy="3840480"/>
+          </a:xfrm>
+          <a:prstGeom prst="roundRect">
+            <a:avLst>
+              <a:gd name="adj" fmla="val 6000"/>
+            </a:avLst>
+          </a:prstGeom>
+          <a:solidFill>
+            <a:srgbClr val="EAF5FC"/>
+          </a:solidFill>
+          <a:ln w="12700">
+            <a:solidFill>
+              <a:srgbClr val="36A9E1"/>
+            </a:solidFill>
+          </a:ln>
+          <a:effectLst/>
+        </p:spPr>
+        <p:style>
+          <a:lnRef idx="1">
+            <a:schemeClr val="accent1"/>
+          </a:lnRef>
+          <a:fillRef idx="3">
+            <a:schemeClr val="accent1"/>
+          </a:fillRef>
+          <a:effectRef idx="2">
+            <a:schemeClr val="accent1"/>
+          </a:effectRef>
+          <a:fontRef idx="minor">
+            <a:schemeClr val="lt1"/>
+          </a:fontRef>
+        </p:style>
+        <p:txBody>
+          <a:bodyPr rtlCol="0" anchor="ctr"/>
+          <a:lstStyle/>
+          <a:p>
+            <a:pPr algn="ctr"/>
+          </a:p>
+        </p:txBody>
+      </p:sp>
       <p:sp>
         <p:nvSpPr>
           <p:cNvPr id="7" name="TextBox 6"/>
@@ -6745,8 +6734,114 @@
         </p:nvSpPr>
         <p:spPr>
           <a:xfrm>
-            <a:off x="457200" y="5440680"/>
-            <a:ext cx="5577840" cy="548640"/>
+            <a:off x="7452360" y="1783080"/>
+            <a:ext cx="4114800" cy="365760"/>
+          </a:xfrm>
+          <a:prstGeom prst="rect">
+            <a:avLst/>
+          </a:prstGeom>
+          <a:noFill/>
+        </p:spPr>
+        <p:txBody>
+          <a:bodyPr wrap="square" lIns="45720" rIns="45720" tIns="27432" bIns="27432" anchor="t">
+            <a:spAutoFit/>
+          </a:bodyPr>
+          <a:lstStyle/>
+          <a:p>
+            <a:pPr algn="l"/>
+            <a:r>
+              <a:rPr sz="1650" b="1">
+                <a:solidFill>
+                  <a:srgbClr val="0B315B"/>
+                </a:solidFill>
+                <a:latin typeface="Noto Sans JP"/>
+              </a:rPr>
+              <a:t>拡張モードの開け方</a:t>
+            </a:r>
+          </a:p>
+        </p:txBody>
+      </p:sp>
+      <p:sp>
+        <p:nvSpPr>
+          <p:cNvPr id="8" name="TextBox 7"/>
+          <p:cNvSpPr txBox="1"/>
+          <p:nvPr/>
+        </p:nvSpPr>
+        <p:spPr>
+          <a:xfrm>
+            <a:off x="7452360" y="2286000"/>
+            <a:ext cx="4114800" cy="3108960"/>
+          </a:xfrm>
+          <a:prstGeom prst="rect">
+            <a:avLst/>
+          </a:prstGeom>
+          <a:noFill/>
+        </p:spPr>
+        <p:txBody>
+          <a:bodyPr wrap="square" lIns="45720" rIns="45720" tIns="27432" bIns="27432" anchor="t">
+            <a:spAutoFit/>
+          </a:bodyPr>
+          <a:lstStyle/>
+          <a:p>
+            <a:pPr algn="l"/>
+            <a:r>
+              <a:rPr sz="1450" b="0">
+                <a:solidFill>
+                  <a:srgbClr val="172433"/>
+                </a:solidFill>
+                <a:latin typeface="Noto Sans JP"/>
+              </a:rPr>
+              <a:t>四角のドラッグに加えて、指・マウスでなぞって囲める</a:t>
+            </a:r>
+          </a:p>
+          <a:p>
+            <a:pPr algn="l"/>
+            <a:r>
+              <a:rPr sz="1450" b="0">
+                <a:solidFill>
+                  <a:srgbClr val="172433"/>
+                </a:solidFill>
+                <a:latin typeface="Noto Sans JP"/>
+              </a:rPr>
+              <a:t>面積は形から端末が測って表示</a:t>
+            </a:r>
+          </a:p>
+          <a:p>
+            <a:pPr algn="l"/>
+            <a:r>
+              <a:rPr sz="1450" b="0">
+                <a:solidFill>
+                  <a:srgbClr val="172433"/>
+                </a:solidFill>
+                <a:latin typeface="Noto Sans JP"/>
+              </a:rPr>
+              <a:t>サーバーが画素の見積もりで二重に確かめる</a:t>
+            </a:r>
+          </a:p>
+          <a:p>
+            <a:pPr algn="l"/>
+            <a:r>
+              <a:rPr sz="1450" b="0">
+                <a:solidFill>
+                  <a:srgbClr val="172433"/>
+                </a:solidFill>
+                <a:latin typeface="Noto Sans JP"/>
+              </a:rPr>
+              <a:t>旧来の四角だけの開け方とも切り替えられる</a:t>
+            </a:r>
+          </a:p>
+        </p:txBody>
+      </p:sp>
+      <p:sp>
+        <p:nvSpPr>
+          <p:cNvPr id="9" name="TextBox 8"/>
+          <p:cNvSpPr txBox="1"/>
+          <p:nvPr/>
+        </p:nvSpPr>
+        <p:spPr>
+          <a:xfrm>
+            <a:off x="457200" y="4937760"/>
+            <a:ext cx="6583680" cy="365760"/>
           </a:xfrm>
           <a:prstGeom prst="rect">
             <a:avLst/>
@@ -6761,48 +6856,13 @@
           <a:p>
             <a:pPr algn="ctr"/>
             <a:r>
-              <a:rPr sz="1350" b="0">
+              <a:rPr sz="1250" b="0">
                 <a:solidFill>
                   <a:srgbClr val="5B6B7D"/>
                 </a:solidFill>
                 <a:latin typeface="Noto Sans JP"/>
               </a:rPr>
-              <a:t>開けた面積は端末が測って表示（上限 20%）</a:t>
-            </a:r>
-          </a:p>
-        </p:txBody>
-      </p:sp>
-      <p:sp>
-        <p:nvSpPr>
-          <p:cNvPr id="8" name="TextBox 7"/>
-          <p:cNvSpPr txBox="1"/>
-          <p:nvPr/>
-        </p:nvSpPr>
-        <p:spPr>
-          <a:xfrm>
-            <a:off x="6263640" y="6035040"/>
-            <a:ext cx="5394960" cy="457200"/>
-          </a:xfrm>
-          <a:prstGeom prst="rect">
-            <a:avLst/>
-          </a:prstGeom>
-          <a:noFill/>
-        </p:spPr>
-        <p:txBody>
-          <a:bodyPr wrap="square" lIns="45720" rIns="45720" tIns="27432" bIns="27432" anchor="t">
-            <a:spAutoFit/>
-          </a:bodyPr>
-          <a:lstStyle/>
-          <a:p>
-            <a:pPr algn="ctr"/>
-            <a:r>
-              <a:rPr sz="1350" b="0">
-                <a:solidFill>
-                  <a:srgbClr val="5B6B7D"/>
-                </a:solidFill>
-                <a:latin typeface="Noto Sans JP"/>
-              </a:rPr>
-              <a:t>カラーコーンと単管を、会話から結びつけて赤丸</a:t>
+              <a:t>図は合成のブロック（実際の画面ではありません）</a:t>
             </a:r>
           </a:p>
         </p:txBody>
